--- a/reports/QM Monthly Report- 2026 Jul.pptx
+++ b/reports/QM Monthly Report- 2026 Jul.pptx
@@ -9208,7 +9208,7 @@
                 </a:solidFill>
                 <a:latin typeface="Microsoft YaHei"/>
               </a:rPr>
-              <a:t>均未发现异常 → 判为「供应商·仓储共担」。</a:t>
+              <a:t>均未发现异常 → 判为「供应商·仓储共担」，根因未落到单一环节。</a:t>
             </a:r>
           </a:p>
           <a:p>
@@ -9224,7 +9224,7 @@
                 </a:solidFill>
                 <a:latin typeface="Microsoft YaHei"/>
               </a:rPr>
-              <a:t>即根因未定位到单一环节：灌装/原奶质量与入库后冷链执行均未排除，</a:t>
+              <a:t>⚠ 检出滞后：客诉 7/8 起已连续反馈奶变质酸败（见第 33 页），</a:t>
             </a:r>
           </a:p>
           <a:p>
@@ -9240,7 +9240,7 @@
                 </a:solidFill>
                 <a:latin typeface="Microsoft YaHei"/>
               </a:rPr>
-              <a:t>现有留样与温度记录不足以判定，冷链链路仍是开放风险。</a:t>
+              <a:t>内部首张变质 PQNC 为 7/19、集群 7/22——客户比工单早约两周。</a:t>
             </a:r>
           </a:p>
         </p:txBody>
@@ -9456,7 +9456,23 @@
                 </a:solidFill>
                 <a:latin typeface="Microsoft YaHei"/>
               </a:rPr>
-              <a:t>④ 建立「同 SKU 跨店 3 起以上」自动预警，避免集群靠人工汇总才被发现。</a:t>
+              <a:t>④ 建立「同 SKU 跨店 3 起以上」自动预警，并把客诉纳入触发条件——</a:t>
+            </a:r>
+          </a:p>
+          <a:p>
+            <a:pPr algn="l">
+              <a:lnSpc>
+                <a:spcPct val="125000"/>
+              </a:lnSpc>
+            </a:pPr>
+            <a:r>
+              <a:rPr sz="900" b="0" a:eastAsianTypeface="Microsoft YaHei">
+                <a:solidFill>
+                  <a:srgbClr val="222222"/>
+                </a:solidFill>
+                <a:latin typeface="Microsoft YaHei"/>
+              </a:rPr>
+              <a:t>   本月客诉信号早于 PQNC 约两周，可据此提前锁定批次。</a:t>
             </a:r>
           </a:p>
         </p:txBody>
@@ -9469,8 +9485,8 @@
         </p:nvSpPr>
         <p:spPr>
           <a:xfrm>
-            <a:off x="502920" y="6163056"/>
-            <a:ext cx="11155680" cy="201168"/>
+            <a:off x="502920" y="6428232"/>
+            <a:ext cx="7863840" cy="201168"/>
           </a:xfrm>
           <a:prstGeom prst="rect">
             <a:avLst/>
@@ -9489,7 +9505,7 @@
               </a:lnSpc>
             </a:pPr>
             <a:r>
-              <a:rPr sz="800" b="0" a:eastAsianTypeface="Microsoft YaHei">
+              <a:rPr sz="750" b="0" a:eastAsianTypeface="Microsoft YaHei">
                 <a:solidFill>
                   <a:srgbClr val="5F6978"/>
                 </a:solidFill>
@@ -11273,8 +11289,8 @@
         </p:nvSpPr>
         <p:spPr>
           <a:xfrm>
-            <a:off x="502920" y="6163056"/>
-            <a:ext cx="11155680" cy="201168"/>
+            <a:off x="502920" y="6428232"/>
+            <a:ext cx="7863840" cy="201168"/>
           </a:xfrm>
           <a:prstGeom prst="rect">
             <a:avLst/>
@@ -11293,7 +11309,7 @@
               </a:lnSpc>
             </a:pPr>
             <a:r>
-              <a:rPr sz="800" b="0" a:eastAsianTypeface="Microsoft YaHei">
+              <a:rPr sz="750" b="0" a:eastAsianTypeface="Microsoft YaHei">
                 <a:solidFill>
                   <a:srgbClr val="5F6978"/>
                 </a:solidFill>
@@ -21675,7 +21691,7 @@
             <a:avLst/>
           </a:prstGeom>
           <a:solidFill>
-            <a:srgbClr val="EB9119"/>
+            <a:srgbClr val="C82D2D"/>
           </a:solidFill>
           <a:ln>
             <a:noFill/>
@@ -21734,7 +21750,7 @@
             <a:r>
               <a:rPr sz="2200" b="1" a:eastAsianTypeface="Microsoft YaHei">
                 <a:solidFill>
-                  <a:srgbClr val="EB9119"/>
+                  <a:srgbClr val="C82D2D"/>
                 </a:solidFill>
                 <a:latin typeface="Microsoft YaHei"/>
               </a:rPr>
@@ -21816,7 +21832,7 @@
                 </a:solidFill>
                 <a:latin typeface="Microsoft YaHei"/>
               </a:rPr>
-              <a:t>食安类客诉 1 起（异物）· YTD 4 起</a:t>
+              <a:t>食安类客诉 7 起 / 6 家门店 · 4 起指向奶变质</a:t>
             </a:r>
           </a:p>
         </p:txBody>
@@ -40809,8 +40825,8 @@
         </p:nvSpPr>
         <p:spPr>
           <a:xfrm>
-            <a:off x="8503920" y="6419088"/>
-            <a:ext cx="3200400" cy="228600"/>
+            <a:off x="502920" y="859536"/>
+            <a:ext cx="11155680" cy="274320"/>
           </a:xfrm>
           <a:prstGeom prst="rect">
             <a:avLst/>
@@ -40823,19 +40839,19 @@
           </a:bodyPr>
           <a:lstStyle/>
           <a:p>
-            <a:pPr algn="r">
+            <a:pPr algn="l">
               <a:lnSpc>
                 <a:spcPct val="100000"/>
               </a:lnSpc>
             </a:pPr>
             <a:r>
-              <a:rPr sz="1000" b="0" a:eastAsianTypeface="Microsoft YaHei">
-                <a:solidFill>
-                  <a:srgbClr val="1F3864"/>
-                </a:solidFill>
-                <a:latin typeface="Microsoft YaHei"/>
-              </a:rPr>
-              <a:t>瑞幸咖啡 · 北美质量保障部</a:t>
+              <a:rPr sz="1100" b="0" a:eastAsianTypeface="Microsoft YaHei">
+                <a:solidFill>
+                  <a:srgbClr val="5F6978"/>
+                </a:solidFill>
+                <a:latin typeface="Microsoft YaHei"/>
+              </a:rPr>
+              <a:t>2026 年 7 月 · 7 起 ※ 6 月 PPT 口径下 1–6 月累计仅 3 起（约 0.5 起/月），与本月导出口径是否一致待客服确认，故本页不做 YTD 同比</a:t>
             </a:r>
           </a:p>
         </p:txBody>
@@ -40848,8 +40864,8 @@
         </p:nvSpPr>
         <p:spPr>
           <a:xfrm>
-            <a:off x="11430000" y="6428232"/>
-            <a:ext cx="365760" cy="228600"/>
+            <a:off x="8503920" y="6419088"/>
+            <a:ext cx="3200400" cy="228600"/>
           </a:xfrm>
           <a:prstGeom prst="rect">
             <a:avLst/>
@@ -40868,6 +40884,45 @@
               </a:lnSpc>
             </a:pPr>
             <a:r>
+              <a:rPr sz="1000" b="0" a:eastAsianTypeface="Microsoft YaHei">
+                <a:solidFill>
+                  <a:srgbClr val="1F3864"/>
+                </a:solidFill>
+                <a:latin typeface="Microsoft YaHei"/>
+              </a:rPr>
+              <a:t>瑞幸咖啡 · 北美质量保障部</a:t>
+            </a:r>
+          </a:p>
+        </p:txBody>
+      </p:sp>
+      <p:sp>
+        <p:nvSpPr>
+          <p:cNvPr id="6" name="TextBox 5"/>
+          <p:cNvSpPr txBox="1"/>
+          <p:nvPr/>
+        </p:nvSpPr>
+        <p:spPr>
+          <a:xfrm>
+            <a:off x="11430000" y="6428232"/>
+            <a:ext cx="365760" cy="228600"/>
+          </a:xfrm>
+          <a:prstGeom prst="rect">
+            <a:avLst/>
+          </a:prstGeom>
+          <a:noFill/>
+        </p:spPr>
+        <p:txBody>
+          <a:bodyPr wrap="square" lIns="0" rIns="0" tIns="0" bIns="0" anchor="t">
+            <a:spAutoFit/>
+          </a:bodyPr>
+          <a:lstStyle/>
+          <a:p>
+            <a:pPr algn="r">
+              <a:lnSpc>
+                <a:spcPct val="100000"/>
+              </a:lnSpc>
+            </a:pPr>
+            <a:r>
               <a:rPr sz="800" b="0" a:eastAsianTypeface="Microsoft YaHei">
                 <a:solidFill>
                   <a:srgbClr val="5F6978"/>
@@ -40881,7 +40936,7 @@
       </p:sp>
       <p:sp>
         <p:nvSpPr>
-          <p:cNvPr id="6" name="Rectangle 5"/>
+          <p:cNvPr id="7" name="Rectangle 6"/>
           <p:cNvSpPr/>
           <p:nvPr/>
         </p:nvSpPr>
@@ -40927,7 +40982,7 @@
       </p:sp>
       <p:sp>
         <p:nvSpPr>
-          <p:cNvPr id="7" name="TextBox 6"/>
+          <p:cNvPr id="8" name="TextBox 7"/>
           <p:cNvSpPr txBox="1"/>
           <p:nvPr/>
         </p:nvSpPr>
@@ -40955,18 +41010,18 @@
             <a:r>
               <a:rPr sz="2400" b="1" a:eastAsianTypeface="Microsoft YaHei">
                 <a:solidFill>
-                  <a:srgbClr val="EB9119"/>
-                </a:solidFill>
-                <a:latin typeface="Microsoft YaHei"/>
-              </a:rPr>
-              <a:t>1</a:t>
-            </a:r>
-          </a:p>
-        </p:txBody>
-      </p:sp>
-      <p:sp>
-        <p:nvSpPr>
-          <p:cNvPr id="8" name="TextBox 7"/>
+                  <a:srgbClr val="C82D2D"/>
+                </a:solidFill>
+                <a:latin typeface="Microsoft YaHei"/>
+              </a:rPr>
+              <a:t>7</a:t>
+            </a:r>
+          </a:p>
+        </p:txBody>
+      </p:sp>
+      <p:sp>
+        <p:nvSpPr>
+          <p:cNvPr id="9" name="TextBox 8"/>
           <p:cNvSpPr txBox="1"/>
           <p:nvPr/>
         </p:nvSpPr>
@@ -41005,7 +41060,7 @@
       </p:sp>
       <p:sp>
         <p:nvSpPr>
-          <p:cNvPr id="9" name="TextBox 8"/>
+          <p:cNvPr id="10" name="TextBox 9"/>
           <p:cNvSpPr txBox="1"/>
           <p:nvPr/>
         </p:nvSpPr>
@@ -41037,14 +41092,14 @@
                 </a:solidFill>
                 <a:latin typeface="Microsoft YaHei"/>
               </a:rPr>
-              <a:t>6 月 1 起，持平</a:t>
-            </a:r>
-          </a:p>
-        </p:txBody>
-      </p:sp>
-      <p:sp>
-        <p:nvSpPr>
-          <p:cNvPr id="10" name="Rectangle 9"/>
+              <a:t>涉及 6 家门店</a:t>
+            </a:r>
+          </a:p>
+        </p:txBody>
+      </p:sp>
+      <p:sp>
+        <p:nvSpPr>
+          <p:cNvPr id="11" name="Rectangle 10"/>
           <p:cNvSpPr/>
           <p:nvPr/>
         </p:nvSpPr>
@@ -41090,7 +41145,7 @@
       </p:sp>
       <p:sp>
         <p:nvSpPr>
-          <p:cNvPr id="11" name="TextBox 10"/>
+          <p:cNvPr id="12" name="TextBox 11"/>
           <p:cNvSpPr txBox="1"/>
           <p:nvPr/>
         </p:nvSpPr>
@@ -41118,7 +41173,7 @@
             <a:r>
               <a:rPr sz="2400" b="1" a:eastAsianTypeface="Microsoft YaHei">
                 <a:solidFill>
-                  <a:srgbClr val="005EB8"/>
+                  <a:srgbClr val="C82D2D"/>
                 </a:solidFill>
                 <a:latin typeface="Microsoft YaHei"/>
               </a:rPr>
@@ -41129,7 +41184,7 @@
       </p:sp>
       <p:sp>
         <p:nvSpPr>
-          <p:cNvPr id="12" name="TextBox 11"/>
+          <p:cNvPr id="13" name="TextBox 12"/>
           <p:cNvSpPr txBox="1"/>
           <p:nvPr/>
         </p:nvSpPr>
@@ -41161,14 +41216,14 @@
                 </a:solidFill>
                 <a:latin typeface="Microsoft YaHei"/>
               </a:rPr>
-              <a:t>2026 YTD 累计</a:t>
-            </a:r>
-          </a:p>
-        </p:txBody>
-      </p:sp>
-      <p:sp>
-        <p:nvSpPr>
-          <p:cNvPr id="13" name="TextBox 12"/>
+              <a:t>变质 / 酸败类</a:t>
+            </a:r>
+          </a:p>
+        </p:txBody>
+      </p:sp>
+      <p:sp>
+        <p:nvSpPr>
+          <p:cNvPr id="14" name="TextBox 13"/>
           <p:cNvSpPr txBox="1"/>
           <p:nvPr/>
         </p:nvSpPr>
@@ -41200,14 +41255,14 @@
                 </a:solidFill>
                 <a:latin typeface="Microsoft YaHei"/>
               </a:rPr>
-              <a:t>1–6 月 3 起 + 7 月 1 起</a:t>
-            </a:r>
-          </a:p>
-        </p:txBody>
-      </p:sp>
-      <p:sp>
-        <p:nvSpPr>
-          <p:cNvPr id="14" name="Rectangle 13"/>
+              <a:t>全部指向奶类</a:t>
+            </a:r>
+          </a:p>
+        </p:txBody>
+      </p:sp>
+      <p:sp>
+        <p:nvSpPr>
+          <p:cNvPr id="15" name="Rectangle 14"/>
           <p:cNvSpPr/>
           <p:nvPr/>
         </p:nvSpPr>
@@ -41253,7 +41308,7 @@
       </p:sp>
       <p:sp>
         <p:nvSpPr>
-          <p:cNvPr id="15" name="TextBox 14"/>
+          <p:cNvPr id="16" name="TextBox 15"/>
           <p:cNvSpPr txBox="1"/>
           <p:nvPr/>
         </p:nvSpPr>
@@ -41279,20 +41334,20 @@
               </a:lnSpc>
             </a:pPr>
             <a:r>
-              <a:rPr sz="2200" b="1" a:eastAsianTypeface="Microsoft YaHei">
+              <a:rPr sz="2400" b="1" a:eastAsianTypeface="Microsoft YaHei">
                 <a:solidFill>
                   <a:srgbClr val="C82D2D"/>
                 </a:solidFill>
                 <a:latin typeface="Microsoft YaHei"/>
               </a:rPr>
-              <a:t>异物</a:t>
-            </a:r>
-          </a:p>
-        </p:txBody>
-      </p:sp>
-      <p:sp>
-        <p:nvSpPr>
-          <p:cNvPr id="16" name="TextBox 15"/>
+              <a:t>2</a:t>
+            </a:r>
+          </a:p>
+        </p:txBody>
+      </p:sp>
+      <p:sp>
+        <p:nvSpPr>
+          <p:cNvPr id="17" name="TextBox 16"/>
           <p:cNvSpPr txBox="1"/>
           <p:nvPr/>
         </p:nvSpPr>
@@ -41324,14 +41379,14 @@
                 </a:solidFill>
                 <a:latin typeface="Microsoft YaHei"/>
               </a:rPr>
-              <a:t>本月投诉性质</a:t>
-            </a:r>
-          </a:p>
-        </p:txBody>
-      </p:sp>
-      <p:sp>
-        <p:nvSpPr>
-          <p:cNvPr id="17" name="TextBox 16"/>
+              <a:t>异物类</a:t>
+            </a:r>
+          </a:p>
+        </p:txBody>
+      </p:sp>
+      <p:sp>
+        <p:nvSpPr>
+          <p:cNvPr id="18" name="TextBox 17"/>
           <p:cNvSpPr txBox="1"/>
           <p:nvPr/>
         </p:nvSpPr>
@@ -41363,14 +41418,14 @@
                 </a:solidFill>
                 <a:latin typeface="Microsoft YaHei"/>
               </a:rPr>
-              <a:t>食品中发现塑料碎片</a:t>
-            </a:r>
-          </a:p>
-        </p:txBody>
-      </p:sp>
-      <p:sp>
-        <p:nvSpPr>
-          <p:cNvPr id="18" name="Rectangle 17"/>
+              <a:t>毛发 1 · 塑料 1</a:t>
+            </a:r>
+          </a:p>
+        </p:txBody>
+      </p:sp>
+      <p:sp>
+        <p:nvSpPr>
+          <p:cNvPr id="19" name="Rectangle 18"/>
           <p:cNvSpPr/>
           <p:nvPr/>
         </p:nvSpPr>
@@ -41416,7 +41471,7 @@
       </p:sp>
       <p:sp>
         <p:nvSpPr>
-          <p:cNvPr id="19" name="TextBox 18"/>
+          <p:cNvPr id="20" name="TextBox 19"/>
           <p:cNvSpPr txBox="1"/>
           <p:nvPr/>
         </p:nvSpPr>
@@ -41442,20 +41497,20 @@
               </a:lnSpc>
             </a:pPr>
             <a:r>
-              <a:rPr sz="1600" b="1" a:eastAsianTypeface="Microsoft YaHei">
+              <a:rPr sz="2200" b="1" a:eastAsianTypeface="Microsoft YaHei">
                 <a:solidFill>
                   <a:srgbClr val="C82D2D"/>
                 </a:solidFill>
                 <a:latin typeface="Microsoft YaHei"/>
               </a:rPr>
-              <a:t>221 Grand</a:t>
-            </a:r>
-          </a:p>
-        </p:txBody>
-      </p:sp>
-      <p:sp>
-        <p:nvSpPr>
-          <p:cNvPr id="20" name="TextBox 19"/>
+              <a:t>11 天</a:t>
+            </a:r>
+          </a:p>
+        </p:txBody>
+      </p:sp>
+      <p:sp>
+        <p:nvSpPr>
+          <p:cNvPr id="21" name="TextBox 20"/>
           <p:cNvSpPr txBox="1"/>
           <p:nvPr/>
         </p:nvSpPr>
@@ -41487,14 +41542,14 @@
                 </a:solidFill>
                 <a:latin typeface="Microsoft YaHei"/>
               </a:rPr>
-              <a:t>涉及门店</a:t>
-            </a:r>
-          </a:p>
-        </p:txBody>
-      </p:sp>
-      <p:sp>
-        <p:nvSpPr>
-          <p:cNvPr id="21" name="TextBox 20"/>
+              <a:t>客诉早于内部工单</a:t>
+            </a:r>
+          </a:p>
+        </p:txBody>
+      </p:sp>
+      <p:sp>
+        <p:nvSpPr>
+          <p:cNvPr id="22" name="TextBox 21"/>
           <p:cNvSpPr txBox="1"/>
           <p:nvPr/>
         </p:nvSpPr>
@@ -41526,20 +41581,20 @@
                 </a:solidFill>
                 <a:latin typeface="Microsoft YaHei"/>
               </a:rPr>
-              <a:t>2026-07-27 12:46</a:t>
-            </a:r>
-          </a:p>
-        </p:txBody>
-      </p:sp>
-      <p:sp>
-        <p:nvSpPr>
-          <p:cNvPr id="22" name="Rectangle 21"/>
+              <a:t>7/8 首诉 → 7/19 首张变质 PQNC</a:t>
+            </a:r>
+          </a:p>
+        </p:txBody>
+      </p:sp>
+      <p:sp>
+        <p:nvSpPr>
+          <p:cNvPr id="23" name="Rectangle 22"/>
           <p:cNvSpPr/>
           <p:nvPr/>
         </p:nvSpPr>
         <p:spPr>
           <a:xfrm>
-            <a:off x="502920" y="2514600"/>
+            <a:off x="502920" y="2487168"/>
             <a:ext cx="11155680" cy="310896"/>
           </a:xfrm>
           <a:prstGeom prst="rect">
@@ -41577,13 +41632,13 @@
       </p:sp>
       <p:sp>
         <p:nvSpPr>
-          <p:cNvPr id="23" name="TextBox 22"/>
+          <p:cNvPr id="24" name="TextBox 23"/>
           <p:cNvSpPr txBox="1"/>
           <p:nvPr/>
         </p:nvSpPr>
         <p:spPr>
           <a:xfrm>
-            <a:off x="612648" y="2569464"/>
+            <a:off x="612648" y="2542032"/>
             <a:ext cx="10936224" cy="219456"/>
           </a:xfrm>
           <a:prstGeom prst="rect">
@@ -41609,22 +41664,22 @@
                 </a:solidFill>
                 <a:latin typeface="Microsoft YaHei"/>
               </a:rPr>
-              <a:t>事件详情 / Complaint Detail</a:t>
+              <a:t>事件明细 / Complaint Detail</a:t>
             </a:r>
           </a:p>
         </p:txBody>
       </p:sp>
       <p:graphicFrame>
         <p:nvGraphicFramePr>
-          <p:cNvPr id="24" name="Table 23"/>
+          <p:cNvPr id="25" name="Table 24"/>
           <p:cNvGraphicFramePr>
             <a:graphicFrameLocks noGrp="1"/>
           </p:cNvGraphicFramePr>
           <p:nvPr/>
         </p:nvGraphicFramePr>
         <p:xfrm>
-          <a:off x="502920" y="2852928"/>
-          <a:ext cx="11155678" cy="731520"/>
+          <a:off x="502920" y="2825496"/>
+          <a:ext cx="11155676" cy="1828800"/>
         </p:xfrm>
         <a:graphic>
           <a:graphicData uri="http://schemas.openxmlformats.org/drawingml/2006/table">
@@ -41633,13 +41688,12 @@
                 <a:tableStyleId>{5C22544A-7EE6-4342-B048-85BDC9FD1C3A}</a:tableStyleId>
               </a:tblPr>
               <a:tblGrid>
-                <a:gridCol w="1889268"/>
-                <a:gridCol w="1349477"/>
-                <a:gridCol w="2698954"/>
-                <a:gridCol w="3958467"/>
-                <a:gridCol w="1259512"/>
+                <a:gridCol w="1737359"/>
+                <a:gridCol w="1737359"/>
+                <a:gridCol w="6400799"/>
+                <a:gridCol w="1280159"/>
               </a:tblGrid>
-              <a:tr h="365760">
+              <a:tr h="228600">
                 <a:tc>
                   <a:txBody>
                     <a:bodyPr/>
@@ -41699,7 +41753,7 @@
                           </a:solidFill>
                           <a:latin typeface="Microsoft YaHei"/>
                         </a:rPr>
-                        <a:t>产品</a:t>
+                        <a:t>客诉原文 / Customer comment</a:t>
                       </a:r>
                     </a:p>
                   </a:txBody>
@@ -41722,30 +41776,7 @@
                           </a:solidFill>
                           <a:latin typeface="Microsoft YaHei"/>
                         </a:rPr>
-                        <a:t>客诉原文</a:t>
-                      </a:r>
-                    </a:p>
-                  </a:txBody>
-                  <a:tcPr marL="45720" marR="45720" marT="18288" marB="18288" anchor="ctr">
-                    <a:solidFill>
-                      <a:srgbClr val="1F3864"/>
-                    </a:solidFill>
-                  </a:tcPr>
-                </a:tc>
-                <a:tc>
-                  <a:txBody>
-                    <a:bodyPr/>
-                    <a:lstStyle/>
-                    <a:p>
-                      <a:pPr algn="ctr"/>
-                      <a:r>
-                        <a:rPr sz="900" b="1">
-                          <a:solidFill>
-                            <a:srgbClr val="FFFFFF"/>
-                          </a:solidFill>
-                          <a:latin typeface="Microsoft YaHei"/>
-                        </a:rPr>
-                        <a:t>性质</a:t>
+                        <a:t>分类</a:t>
                       </a:r>
                     </a:p>
                   </a:txBody>
@@ -41756,7 +41787,7 @@
                   </a:tcPr>
                 </a:tc>
               </a:tr>
-              <a:tr h="365760">
+              <a:tr h="228600">
                 <a:tc>
                   <a:txBody>
                     <a:bodyPr/>
@@ -41764,13 +41795,13 @@
                     <a:p>
                       <a:pPr algn="ctr"/>
                       <a:r>
-                        <a:rPr sz="900" b="0">
+                        <a:rPr sz="850" b="0">
                           <a:solidFill>
                             <a:srgbClr val="222222"/>
                           </a:solidFill>
                           <a:latin typeface="Microsoft YaHei"/>
                         </a:rPr>
-                        <a:t>07/27/2026 12:46pm</a:t>
+                        <a:t>Jul 8, 11:06 AM</a:t>
                       </a:r>
                     </a:p>
                   </a:txBody>
@@ -41787,7 +41818,571 @@
                     <a:p>
                       <a:pPr algn="l"/>
                       <a:r>
-                        <a:rPr sz="900" b="0">
+                        <a:rPr sz="850" b="0">
+                          <a:solidFill>
+                            <a:srgbClr val="222222"/>
+                          </a:solidFill>
+                          <a:latin typeface="Microsoft YaHei"/>
+                        </a:rPr>
+                        <a:t>41st &amp; Lexington</a:t>
+                      </a:r>
+                    </a:p>
+                  </a:txBody>
+                  <a:tcPr marL="45720" marR="45720" marT="13716" marB="13716" anchor="ctr">
+                    <a:solidFill>
+                      <a:srgbClr val="FFFFFF"/>
+                    </a:solidFill>
+                  </a:tcPr>
+                </a:tc>
+                <a:tc>
+                  <a:txBody>
+                    <a:bodyPr/>
+                    <a:lstStyle/>
+                    <a:p>
+                      <a:pPr algn="l"/>
+                      <a:r>
+                        <a:rPr sz="850" b="0">
+                          <a:solidFill>
+                            <a:srgbClr val="222222"/>
+                          </a:solidFill>
+                          <a:latin typeface="Microsoft YaHei"/>
+                        </a:rPr>
+                        <a:t>“The coconut milk has most definitely gone bad. The drink tastes sour and spoiled”</a:t>
+                      </a:r>
+                    </a:p>
+                  </a:txBody>
+                  <a:tcPr marL="45720" marR="45720" marT="13716" marB="13716" anchor="ctr">
+                    <a:solidFill>
+                      <a:srgbClr val="FFFFFF"/>
+                    </a:solidFill>
+                  </a:tcPr>
+                </a:tc>
+                <a:tc>
+                  <a:txBody>
+                    <a:bodyPr/>
+                    <a:lstStyle/>
+                    <a:p>
+                      <a:pPr algn="ctr"/>
+                      <a:r>
+                        <a:rPr sz="850" b="0">
+                          <a:solidFill>
+                            <a:srgbClr val="222222"/>
+                          </a:solidFill>
+                          <a:latin typeface="Microsoft YaHei"/>
+                        </a:rPr>
+                        <a:t>变质酸败</a:t>
+                      </a:r>
+                    </a:p>
+                  </a:txBody>
+                  <a:tcPr marL="45720" marR="45720" marT="13716" marB="13716" anchor="ctr">
+                    <a:solidFill>
+                      <a:srgbClr val="FFFFFF"/>
+                    </a:solidFill>
+                  </a:tcPr>
+                </a:tc>
+              </a:tr>
+              <a:tr h="228600">
+                <a:tc>
+                  <a:txBody>
+                    <a:bodyPr/>
+                    <a:lstStyle/>
+                    <a:p>
+                      <a:pPr algn="ctr"/>
+                      <a:r>
+                        <a:rPr sz="850" b="0">
+                          <a:solidFill>
+                            <a:srgbClr val="222222"/>
+                          </a:solidFill>
+                          <a:latin typeface="Microsoft YaHei"/>
+                        </a:rPr>
+                        <a:t>Jul 12, 1:52 PM</a:t>
+                      </a:r>
+                    </a:p>
+                  </a:txBody>
+                  <a:tcPr marL="45720" marR="45720" marT="13716" marB="13716" anchor="ctr">
+                    <a:solidFill>
+                      <a:srgbClr val="F5F7FA"/>
+                    </a:solidFill>
+                  </a:tcPr>
+                </a:tc>
+                <a:tc>
+                  <a:txBody>
+                    <a:bodyPr/>
+                    <a:lstStyle/>
+                    <a:p>
+                      <a:pPr algn="l"/>
+                      <a:r>
+                        <a:rPr sz="850" b="0">
+                          <a:solidFill>
+                            <a:srgbClr val="222222"/>
+                          </a:solidFill>
+                          <a:latin typeface="Microsoft YaHei"/>
+                        </a:rPr>
+                        <a:t>28th &amp; 6th</a:t>
+                      </a:r>
+                    </a:p>
+                  </a:txBody>
+                  <a:tcPr marL="45720" marR="45720" marT="13716" marB="13716" anchor="ctr">
+                    <a:solidFill>
+                      <a:srgbClr val="F5F7FA"/>
+                    </a:solidFill>
+                  </a:tcPr>
+                </a:tc>
+                <a:tc>
+                  <a:txBody>
+                    <a:bodyPr/>
+                    <a:lstStyle/>
+                    <a:p>
+                      <a:pPr algn="l"/>
+                      <a:r>
+                        <a:rPr sz="850" b="0">
+                          <a:solidFill>
+                            <a:srgbClr val="222222"/>
+                          </a:solidFill>
+                          <a:latin typeface="Microsoft YaHei"/>
+                        </a:rPr>
+                        <a:t>“Tastes sour like the coconut milk is bad”</a:t>
+                      </a:r>
+                    </a:p>
+                  </a:txBody>
+                  <a:tcPr marL="45720" marR="45720" marT="13716" marB="13716" anchor="ctr">
+                    <a:solidFill>
+                      <a:srgbClr val="F5F7FA"/>
+                    </a:solidFill>
+                  </a:tcPr>
+                </a:tc>
+                <a:tc>
+                  <a:txBody>
+                    <a:bodyPr/>
+                    <a:lstStyle/>
+                    <a:p>
+                      <a:pPr algn="ctr"/>
+                      <a:r>
+                        <a:rPr sz="850" b="0">
+                          <a:solidFill>
+                            <a:srgbClr val="222222"/>
+                          </a:solidFill>
+                          <a:latin typeface="Microsoft YaHei"/>
+                        </a:rPr>
+                        <a:t>变质酸败</a:t>
+                      </a:r>
+                    </a:p>
+                  </a:txBody>
+                  <a:tcPr marL="45720" marR="45720" marT="13716" marB="13716" anchor="ctr">
+                    <a:solidFill>
+                      <a:srgbClr val="F5F7FA"/>
+                    </a:solidFill>
+                  </a:tcPr>
+                </a:tc>
+              </a:tr>
+              <a:tr h="228600">
+                <a:tc>
+                  <a:txBody>
+                    <a:bodyPr/>
+                    <a:lstStyle/>
+                    <a:p>
+                      <a:pPr algn="ctr"/>
+                      <a:r>
+                        <a:rPr sz="850" b="0">
+                          <a:solidFill>
+                            <a:srgbClr val="222222"/>
+                          </a:solidFill>
+                          <a:latin typeface="Microsoft YaHei"/>
+                        </a:rPr>
+                        <a:t>Jul 14, 1:02 PM</a:t>
+                      </a:r>
+                    </a:p>
+                  </a:txBody>
+                  <a:tcPr marL="45720" marR="45720" marT="13716" marB="13716" anchor="ctr">
+                    <a:solidFill>
+                      <a:srgbClr val="FFFFFF"/>
+                    </a:solidFill>
+                  </a:tcPr>
+                </a:tc>
+                <a:tc>
+                  <a:txBody>
+                    <a:bodyPr/>
+                    <a:lstStyle/>
+                    <a:p>
+                      <a:pPr algn="l"/>
+                      <a:r>
+                        <a:rPr sz="850" b="0">
+                          <a:solidFill>
+                            <a:srgbClr val="222222"/>
+                          </a:solidFill>
+                          <a:latin typeface="Microsoft YaHei"/>
+                        </a:rPr>
+                        <a:t>37th &amp; Broadway</a:t>
+                      </a:r>
+                    </a:p>
+                  </a:txBody>
+                  <a:tcPr marL="45720" marR="45720" marT="13716" marB="13716" anchor="ctr">
+                    <a:solidFill>
+                      <a:srgbClr val="FFFFFF"/>
+                    </a:solidFill>
+                  </a:tcPr>
+                </a:tc>
+                <a:tc>
+                  <a:txBody>
+                    <a:bodyPr/>
+                    <a:lstStyle/>
+                    <a:p>
+                      <a:pPr algn="l"/>
+                      <a:r>
+                        <a:rPr sz="850" b="0">
+                          <a:solidFill>
+                            <a:srgbClr val="222222"/>
+                          </a:solidFill>
+                          <a:latin typeface="Microsoft YaHei"/>
+                        </a:rPr>
+                        <a:t>“The milk had curdled at the top where the orange flavor was added.”</a:t>
+                      </a:r>
+                    </a:p>
+                  </a:txBody>
+                  <a:tcPr marL="45720" marR="45720" marT="13716" marB="13716" anchor="ctr">
+                    <a:solidFill>
+                      <a:srgbClr val="FFFFFF"/>
+                    </a:solidFill>
+                  </a:tcPr>
+                </a:tc>
+                <a:tc>
+                  <a:txBody>
+                    <a:bodyPr/>
+                    <a:lstStyle/>
+                    <a:p>
+                      <a:pPr algn="ctr"/>
+                      <a:r>
+                        <a:rPr sz="850" b="0">
+                          <a:solidFill>
+                            <a:srgbClr val="222222"/>
+                          </a:solidFill>
+                          <a:latin typeface="Microsoft YaHei"/>
+                        </a:rPr>
+                        <a:t>变质酸败</a:t>
+                      </a:r>
+                    </a:p>
+                  </a:txBody>
+                  <a:tcPr marL="45720" marR="45720" marT="13716" marB="13716" anchor="ctr">
+                    <a:solidFill>
+                      <a:srgbClr val="FFFFFF"/>
+                    </a:solidFill>
+                  </a:tcPr>
+                </a:tc>
+              </a:tr>
+              <a:tr h="228600">
+                <a:tc>
+                  <a:txBody>
+                    <a:bodyPr/>
+                    <a:lstStyle/>
+                    <a:p>
+                      <a:pPr algn="ctr"/>
+                      <a:r>
+                        <a:rPr sz="850" b="0">
+                          <a:solidFill>
+                            <a:srgbClr val="222222"/>
+                          </a:solidFill>
+                          <a:latin typeface="Microsoft YaHei"/>
+                        </a:rPr>
+                        <a:t>Jul 17, 2:42 PM</a:t>
+                      </a:r>
+                    </a:p>
+                  </a:txBody>
+                  <a:tcPr marL="45720" marR="45720" marT="13716" marB="13716" anchor="ctr">
+                    <a:solidFill>
+                      <a:srgbClr val="F5F7FA"/>
+                    </a:solidFill>
+                  </a:tcPr>
+                </a:tc>
+                <a:tc>
+                  <a:txBody>
+                    <a:bodyPr/>
+                    <a:lstStyle/>
+                    <a:p>
+                      <a:pPr algn="l"/>
+                      <a:r>
+                        <a:rPr sz="850" b="0">
+                          <a:solidFill>
+                            <a:srgbClr val="222222"/>
+                          </a:solidFill>
+                          <a:latin typeface="Microsoft YaHei"/>
+                        </a:rPr>
+                        <a:t>100 Maiden Ln</a:t>
+                      </a:r>
+                    </a:p>
+                  </a:txBody>
+                  <a:tcPr marL="45720" marR="45720" marT="13716" marB="13716" anchor="ctr">
+                    <a:solidFill>
+                      <a:srgbClr val="F5F7FA"/>
+                    </a:solidFill>
+                  </a:tcPr>
+                </a:tc>
+                <a:tc>
+                  <a:txBody>
+                    <a:bodyPr/>
+                    <a:lstStyle/>
+                    <a:p>
+                      <a:pPr algn="l"/>
+                      <a:r>
+                        <a:rPr sz="850" b="0">
+                          <a:solidFill>
+                            <a:srgbClr val="222222"/>
+                          </a:solidFill>
+                          <a:latin typeface="Microsoft YaHei"/>
+                        </a:rPr>
+                        <a:t>“Strange chemical taste”</a:t>
+                      </a:r>
+                    </a:p>
+                  </a:txBody>
+                  <a:tcPr marL="45720" marR="45720" marT="13716" marB="13716" anchor="ctr">
+                    <a:solidFill>
+                      <a:srgbClr val="F5F7FA"/>
+                    </a:solidFill>
+                  </a:tcPr>
+                </a:tc>
+                <a:tc>
+                  <a:txBody>
+                    <a:bodyPr/>
+                    <a:lstStyle/>
+                    <a:p>
+                      <a:pPr algn="ctr"/>
+                      <a:r>
+                        <a:rPr sz="850" b="0">
+                          <a:solidFill>
+                            <a:srgbClr val="222222"/>
+                          </a:solidFill>
+                          <a:latin typeface="Microsoft YaHei"/>
+                        </a:rPr>
+                        <a:t>异味</a:t>
+                      </a:r>
+                    </a:p>
+                  </a:txBody>
+                  <a:tcPr marL="45720" marR="45720" marT="13716" marB="13716" anchor="ctr">
+                    <a:solidFill>
+                      <a:srgbClr val="F5F7FA"/>
+                    </a:solidFill>
+                  </a:tcPr>
+                </a:tc>
+              </a:tr>
+              <a:tr h="228600">
+                <a:tc>
+                  <a:txBody>
+                    <a:bodyPr/>
+                    <a:lstStyle/>
+                    <a:p>
+                      <a:pPr algn="ctr"/>
+                      <a:r>
+                        <a:rPr sz="850" b="0">
+                          <a:solidFill>
+                            <a:srgbClr val="222222"/>
+                          </a:solidFill>
+                          <a:latin typeface="Microsoft YaHei"/>
+                        </a:rPr>
+                        <a:t>Jul 17, 8:33 PM</a:t>
+                      </a:r>
+                    </a:p>
+                  </a:txBody>
+                  <a:tcPr marL="45720" marR="45720" marT="13716" marB="13716" anchor="ctr">
+                    <a:solidFill>
+                      <a:srgbClr val="FFFFFF"/>
+                    </a:solidFill>
+                  </a:tcPr>
+                </a:tc>
+                <a:tc>
+                  <a:txBody>
+                    <a:bodyPr/>
+                    <a:lstStyle/>
+                    <a:p>
+                      <a:pPr algn="l"/>
+                      <a:r>
+                        <a:rPr sz="850" b="0">
+                          <a:solidFill>
+                            <a:srgbClr val="222222"/>
+                          </a:solidFill>
+                          <a:latin typeface="Microsoft YaHei"/>
+                        </a:rPr>
+                        <a:t>37th &amp; Broadway</a:t>
+                      </a:r>
+                    </a:p>
+                  </a:txBody>
+                  <a:tcPr marL="45720" marR="45720" marT="13716" marB="13716" anchor="ctr">
+                    <a:solidFill>
+                      <a:srgbClr val="FFFFFF"/>
+                    </a:solidFill>
+                  </a:tcPr>
+                </a:tc>
+                <a:tc>
+                  <a:txBody>
+                    <a:bodyPr/>
+                    <a:lstStyle/>
+                    <a:p>
+                      <a:pPr algn="l"/>
+                      <a:r>
+                        <a:rPr sz="850" b="0">
+                          <a:solidFill>
+                            <a:srgbClr val="222222"/>
+                          </a:solidFill>
+                          <a:latin typeface="Microsoft YaHei"/>
+                        </a:rPr>
+                        <a:t>“It taste so bad, i felt like i was drinking expired milk”</a:t>
+                      </a:r>
+                    </a:p>
+                  </a:txBody>
+                  <a:tcPr marL="45720" marR="45720" marT="13716" marB="13716" anchor="ctr">
+                    <a:solidFill>
+                      <a:srgbClr val="FFFFFF"/>
+                    </a:solidFill>
+                  </a:tcPr>
+                </a:tc>
+                <a:tc>
+                  <a:txBody>
+                    <a:bodyPr/>
+                    <a:lstStyle/>
+                    <a:p>
+                      <a:pPr algn="ctr"/>
+                      <a:r>
+                        <a:rPr sz="850" b="0">
+                          <a:solidFill>
+                            <a:srgbClr val="222222"/>
+                          </a:solidFill>
+                          <a:latin typeface="Microsoft YaHei"/>
+                        </a:rPr>
+                        <a:t>变质酸败</a:t>
+                      </a:r>
+                    </a:p>
+                  </a:txBody>
+                  <a:tcPr marL="45720" marR="45720" marT="13716" marB="13716" anchor="ctr">
+                    <a:solidFill>
+                      <a:srgbClr val="FFFFFF"/>
+                    </a:solidFill>
+                  </a:tcPr>
+                </a:tc>
+              </a:tr>
+              <a:tr h="228600">
+                <a:tc>
+                  <a:txBody>
+                    <a:bodyPr/>
+                    <a:lstStyle/>
+                    <a:p>
+                      <a:pPr algn="ctr"/>
+                      <a:r>
+                        <a:rPr sz="850" b="0">
+                          <a:solidFill>
+                            <a:srgbClr val="222222"/>
+                          </a:solidFill>
+                          <a:latin typeface="Microsoft YaHei"/>
+                        </a:rPr>
+                        <a:t>Jul 24, 8:00 AM</a:t>
+                      </a:r>
+                    </a:p>
+                  </a:txBody>
+                  <a:tcPr marL="45720" marR="45720" marT="13716" marB="13716" anchor="ctr">
+                    <a:solidFill>
+                      <a:srgbClr val="F5F7FA"/>
+                    </a:solidFill>
+                  </a:tcPr>
+                </a:tc>
+                <a:tc>
+                  <a:txBody>
+                    <a:bodyPr/>
+                    <a:lstStyle/>
+                    <a:p>
+                      <a:pPr algn="l"/>
+                      <a:r>
+                        <a:rPr sz="850" b="0">
+                          <a:solidFill>
+                            <a:srgbClr val="222222"/>
+                          </a:solidFill>
+                          <a:latin typeface="Microsoft YaHei"/>
+                        </a:rPr>
+                        <a:t>15th &amp; 3rd</a:t>
+                      </a:r>
+                    </a:p>
+                  </a:txBody>
+                  <a:tcPr marL="45720" marR="45720" marT="13716" marB="13716" anchor="ctr">
+                    <a:solidFill>
+                      <a:srgbClr val="F5F7FA"/>
+                    </a:solidFill>
+                  </a:tcPr>
+                </a:tc>
+                <a:tc>
+                  <a:txBody>
+                    <a:bodyPr/>
+                    <a:lstStyle/>
+                    <a:p>
+                      <a:pPr algn="l"/>
+                      <a:r>
+                        <a:rPr sz="850" b="0">
+                          <a:solidFill>
+                            <a:srgbClr val="222222"/>
+                          </a:solidFill>
+                          <a:latin typeface="Microsoft YaHei"/>
+                        </a:rPr>
+                        <a:t>“Hair in food”</a:t>
+                      </a:r>
+                    </a:p>
+                  </a:txBody>
+                  <a:tcPr marL="45720" marR="45720" marT="13716" marB="13716" anchor="ctr">
+                    <a:solidFill>
+                      <a:srgbClr val="F5F7FA"/>
+                    </a:solidFill>
+                  </a:tcPr>
+                </a:tc>
+                <a:tc>
+                  <a:txBody>
+                    <a:bodyPr/>
+                    <a:lstStyle/>
+                    <a:p>
+                      <a:pPr algn="ctr"/>
+                      <a:r>
+                        <a:rPr sz="850" b="0">
+                          <a:solidFill>
+                            <a:srgbClr val="222222"/>
+                          </a:solidFill>
+                          <a:latin typeface="Microsoft YaHei"/>
+                        </a:rPr>
+                        <a:t>异物</a:t>
+                      </a:r>
+                    </a:p>
+                  </a:txBody>
+                  <a:tcPr marL="45720" marR="45720" marT="13716" marB="13716" anchor="ctr">
+                    <a:solidFill>
+                      <a:srgbClr val="F5F7FA"/>
+                    </a:solidFill>
+                  </a:tcPr>
+                </a:tc>
+              </a:tr>
+              <a:tr h="228600">
+                <a:tc>
+                  <a:txBody>
+                    <a:bodyPr/>
+                    <a:lstStyle/>
+                    <a:p>
+                      <a:pPr algn="ctr"/>
+                      <a:r>
+                        <a:rPr sz="850" b="0">
+                          <a:solidFill>
+                            <a:srgbClr val="222222"/>
+                          </a:solidFill>
+                          <a:latin typeface="Microsoft YaHei"/>
+                        </a:rPr>
+                        <a:t>Jul 27, 12:42 PM</a:t>
+                      </a:r>
+                    </a:p>
+                  </a:txBody>
+                  <a:tcPr marL="45720" marR="45720" marT="13716" marB="13716" anchor="ctr">
+                    <a:solidFill>
+                      <a:srgbClr val="FFFFFF"/>
+                    </a:solidFill>
+                  </a:tcPr>
+                </a:tc>
+                <a:tc>
+                  <a:txBody>
+                    <a:bodyPr/>
+                    <a:lstStyle/>
+                    <a:p>
+                      <a:pPr algn="l"/>
+                      <a:r>
+                        <a:rPr sz="850" b="0">
                           <a:solidFill>
                             <a:srgbClr val="222222"/>
                           </a:solidFill>
@@ -41810,36 +42405,13 @@
                     <a:p>
                       <a:pPr algn="l"/>
                       <a:r>
-                        <a:rPr sz="900" b="0">
+                        <a:rPr sz="850" b="0">
                           <a:solidFill>
                             <a:srgbClr val="222222"/>
                           </a:solidFill>
                           <a:latin typeface="Microsoft YaHei"/>
                         </a:rPr>
-                        <a:t>Sausage Egg &amp; Cheese Croissant</a:t>
-                      </a:r>
-                    </a:p>
-                  </a:txBody>
-                  <a:tcPr marL="45720" marR="45720" marT="13716" marB="13716" anchor="ctr">
-                    <a:solidFill>
-                      <a:srgbClr val="FFFFFF"/>
-                    </a:solidFill>
-                  </a:tcPr>
-                </a:tc>
-                <a:tc>
-                  <a:txBody>
-                    <a:bodyPr/>
-                    <a:lstStyle/>
-                    <a:p>
-                      <a:pPr algn="l"/>
-                      <a:r>
-                        <a:rPr sz="900" b="0">
-                          <a:solidFill>
-                            <a:srgbClr val="222222"/>
-                          </a:solidFill>
-                          <a:latin typeface="Microsoft YaHei"/>
-                        </a:rPr>
-                        <a:t>"There was a piece of plastic in my food"</a:t>
+                        <a:t>“There was a piece of plastic in my food”</a:t>
                       </a:r>
                     </a:p>
                   </a:txBody>
@@ -41856,13 +42428,13 @@
                     <a:p>
                       <a:pPr algn="ctr"/>
                       <a:r>
-                        <a:rPr sz="900" b="0">
+                        <a:rPr sz="850" b="0">
                           <a:solidFill>
                             <a:srgbClr val="222222"/>
                           </a:solidFill>
                           <a:latin typeface="Microsoft YaHei"/>
                         </a:rPr>
-                        <a:t>异物 · 食安</a:t>
+                        <a:t>异物</a:t>
                       </a:r>
                     </a:p>
                   </a:txBody>
@@ -41879,13 +42451,13 @@
       </p:graphicFrame>
       <p:sp>
         <p:nvSpPr>
-          <p:cNvPr id="25" name="Rectangle 24"/>
+          <p:cNvPr id="26" name="Rectangle 25"/>
           <p:cNvSpPr/>
           <p:nvPr/>
         </p:nvSpPr>
         <p:spPr>
           <a:xfrm>
-            <a:off x="502920" y="3794760"/>
+            <a:off x="502920" y="4800600"/>
             <a:ext cx="5486400" cy="310896"/>
           </a:xfrm>
           <a:prstGeom prst="rect">
@@ -41923,13 +42495,13 @@
       </p:sp>
       <p:sp>
         <p:nvSpPr>
-          <p:cNvPr id="26" name="TextBox 25"/>
+          <p:cNvPr id="27" name="TextBox 26"/>
           <p:cNvSpPr txBox="1"/>
           <p:nvPr/>
         </p:nvSpPr>
         <p:spPr>
           <a:xfrm>
-            <a:off x="612648" y="3849624"/>
+            <a:off x="612648" y="4855464"/>
             <a:ext cx="5266944" cy="219456"/>
           </a:xfrm>
           <a:prstGeom prst="rect">
@@ -41962,14 +42534,14 @@
       </p:sp>
       <p:sp>
         <p:nvSpPr>
-          <p:cNvPr id="27" name="Rectangle 26"/>
+          <p:cNvPr id="28" name="Rectangle 27"/>
           <p:cNvSpPr/>
           <p:nvPr/>
         </p:nvSpPr>
         <p:spPr>
           <a:xfrm>
-            <a:off x="502920" y="4105656"/>
-            <a:ext cx="5486400" cy="2011680"/>
+            <a:off x="502920" y="5111496"/>
+            <a:ext cx="5486400" cy="1243584"/>
           </a:xfrm>
           <a:prstGeom prst="rect">
             <a:avLst/>
@@ -42008,14 +42580,14 @@
       </p:sp>
       <p:sp>
         <p:nvSpPr>
-          <p:cNvPr id="28" name="TextBox 27"/>
+          <p:cNvPr id="29" name="TextBox 28"/>
           <p:cNvSpPr txBox="1"/>
           <p:nvPr/>
         </p:nvSpPr>
         <p:spPr>
           <a:xfrm>
-            <a:off x="649224" y="4224528"/>
-            <a:ext cx="5193792" cy="1773936"/>
+            <a:off x="649224" y="5230368"/>
+            <a:ext cx="5193792" cy="1005840"/>
           </a:xfrm>
           <a:prstGeom prst="rect">
             <a:avLst/>
@@ -42034,13 +42606,13 @@
               </a:lnSpc>
             </a:pPr>
             <a:r>
-              <a:rPr sz="950" b="0" a:eastAsianTypeface="Microsoft YaHei">
+              <a:rPr sz="850" b="0" a:eastAsianTypeface="Microsoft YaHei">
                 <a:solidFill>
                   <a:srgbClr val="222222"/>
                 </a:solidFill>
                 <a:latin typeface="Microsoft YaHei"/>
               </a:rPr>
-              <a:t>本月唯一食安类客诉，为「成品中发现塑料异物」，风险等级高于</a:t>
+              <a:t>7 起中 4 起为奶类变质酸败、1 起异味，2 起异物（毛发、塑料）。</a:t>
             </a:r>
           </a:p>
           <a:p>
@@ -42050,13 +42622,13 @@
               </a:lnSpc>
             </a:pPr>
             <a:r>
-              <a:rPr sz="950" b="0" a:eastAsianTypeface="Microsoft YaHei">
+              <a:rPr sz="850" b="0" a:eastAsianTypeface="Microsoft YaHei">
                 <a:solidFill>
                   <a:srgbClr val="222222"/>
                 </a:solidFill>
                 <a:latin typeface="Microsoft YaHei"/>
               </a:rPr>
-              <a:t>6 月（疑似食源性疾病、监控未见异常、判定个案）。</a:t>
+              <a:t>⚠ 检出滞后：客诉 7/8 即报椰奶变质，内部首张变质 PQNC 为 7/19、</a:t>
             </a:r>
           </a:p>
           <a:p>
@@ -42066,13 +42638,13 @@
               </a:lnSpc>
             </a:pPr>
             <a:r>
-              <a:rPr sz="950" b="0" a:eastAsianTypeface="Microsoft YaHei">
+              <a:rPr sz="850" b="0" a:eastAsianTypeface="Microsoft YaHei">
                 <a:solidFill>
                   <a:srgbClr val="222222"/>
                 </a:solidFill>
                 <a:latin typeface="Microsoft YaHei"/>
               </a:rPr>
-              <a:t/>
+              <a:t>集群 7/22 才爆发——「客户比工单早约两周发现同一问题」。</a:t>
             </a:r>
           </a:p>
           <a:p>
@@ -42082,13 +42654,13 @@
               </a:lnSpc>
             </a:pPr>
             <a:r>
-              <a:rPr sz="950" b="0" a:eastAsianTypeface="Microsoft YaHei">
+              <a:rPr sz="850" b="0" a:eastAsianTypeface="Microsoft YaHei">
                 <a:solidFill>
                   <a:srgbClr val="222222"/>
                 </a:solidFill>
                 <a:latin typeface="Microsoft YaHei"/>
               </a:rPr>
-              <a:t>涉事产品为轻食类（可颂），非门店现制饮品——异物可能</a:t>
+              <a:t>37th &amp; Broadway 7/14、7/17 两次客诉，同店 7/21 才开 PQNC（滞后 7 天）。</a:t>
             </a:r>
           </a:p>
           <a:p>
@@ -42098,13 +42670,13 @@
               </a:lnSpc>
             </a:pPr>
             <a:r>
-              <a:rPr sz="950" b="0" a:eastAsianTypeface="Microsoft YaHei">
+              <a:rPr sz="850" b="0" a:eastAsianTypeface="Microsoft YaHei">
                 <a:solidFill>
                   <a:srgbClr val="222222"/>
                 </a:solidFill>
                 <a:latin typeface="Microsoft YaHei"/>
               </a:rPr>
-              <a:t>来自供应商包装、解冻/加热环节或门店操作，需三段排查。</a:t>
+              <a:t>41st &amp; Lexington（7/8 首诉）与 15th &amp; 3rd 全月「无」对应 PQNC，客诉未回流质量工单。</a:t>
             </a:r>
           </a:p>
           <a:p>
@@ -42114,58 +42686,26 @@
               </a:lnSpc>
             </a:pPr>
             <a:r>
-              <a:rPr sz="950" b="0" a:eastAsianTypeface="Microsoft YaHei">
+              <a:rPr sz="850" b="0" a:eastAsianTypeface="Microsoft YaHei">
                 <a:solidFill>
                   <a:srgbClr val="222222"/>
                 </a:solidFill>
                 <a:latin typeface="Microsoft YaHei"/>
               </a:rPr>
-              <a:t/>
-            </a:r>
-          </a:p>
-          <a:p>
-            <a:pPr algn="l">
-              <a:lnSpc>
-                <a:spcPct val="125000"/>
-              </a:lnSpc>
-            </a:pPr>
-            <a:r>
-              <a:rPr sz="950" b="0" a:eastAsianTypeface="Microsoft YaHei">
-                <a:solidFill>
-                  <a:srgbClr val="222222"/>
-                </a:solidFill>
-                <a:latin typeface="Microsoft YaHei"/>
-              </a:rPr>
-              <a:t>⚠ 同月同店：221 Grand 亦有 1 起 PQNC（Cream-O-Land 脱脂奶</a:t>
-            </a:r>
-          </a:p>
-          <a:p>
-            <a:pPr algn="l">
-              <a:lnSpc>
-                <a:spcPct val="125000"/>
-              </a:lnSpc>
-            </a:pPr>
-            <a:r>
-              <a:rPr sz="950" b="0" a:eastAsianTypeface="Microsoft YaHei">
-                <a:solidFill>
-                  <a:srgbClr val="222222"/>
-                </a:solidFill>
-                <a:latin typeface="Microsoft YaHei"/>
-              </a:rPr>
-              <a:t>变质集群，见 Case B），该店本月出现两类独立食安信号。</a:t>
-            </a:r>
-          </a:p>
-        </p:txBody>
-      </p:sp>
-      <p:sp>
-        <p:nvSpPr>
-          <p:cNvPr id="29" name="Rectangle 28"/>
+              <a:t>客诉 6 家中仅 3 家落在 Case B 集群内。</a:t>
+            </a:r>
+          </a:p>
+        </p:txBody>
+      </p:sp>
+      <p:sp>
+        <p:nvSpPr>
+          <p:cNvPr id="30" name="Rectangle 29"/>
           <p:cNvSpPr/>
           <p:nvPr/>
         </p:nvSpPr>
         <p:spPr>
           <a:xfrm>
-            <a:off x="6172200" y="3794760"/>
+            <a:off x="6172200" y="4800600"/>
             <a:ext cx="5486400" cy="310896"/>
           </a:xfrm>
           <a:prstGeom prst="rect">
@@ -42203,13 +42743,13 @@
       </p:sp>
       <p:sp>
         <p:nvSpPr>
-          <p:cNvPr id="30" name="TextBox 29"/>
+          <p:cNvPr id="31" name="TextBox 30"/>
           <p:cNvSpPr txBox="1"/>
           <p:nvPr/>
         </p:nvSpPr>
         <p:spPr>
           <a:xfrm>
-            <a:off x="6281928" y="3849624"/>
+            <a:off x="6281928" y="4855464"/>
             <a:ext cx="5266944" cy="219456"/>
           </a:xfrm>
           <a:prstGeom prst="rect">
@@ -42242,14 +42782,14 @@
       </p:sp>
       <p:sp>
         <p:nvSpPr>
-          <p:cNvPr id="31" name="Rectangle 30"/>
+          <p:cNvPr id="32" name="Rectangle 31"/>
           <p:cNvSpPr/>
           <p:nvPr/>
         </p:nvSpPr>
         <p:spPr>
           <a:xfrm>
-            <a:off x="6172200" y="4105656"/>
-            <a:ext cx="5486400" cy="2011680"/>
+            <a:off x="6172200" y="5111496"/>
+            <a:ext cx="5486400" cy="1243584"/>
           </a:xfrm>
           <a:prstGeom prst="rect">
             <a:avLst/>
@@ -42288,14 +42828,14 @@
       </p:sp>
       <p:sp>
         <p:nvSpPr>
-          <p:cNvPr id="32" name="TextBox 31"/>
+          <p:cNvPr id="33" name="TextBox 32"/>
           <p:cNvSpPr txBox="1"/>
           <p:nvPr/>
         </p:nvSpPr>
         <p:spPr>
           <a:xfrm>
-            <a:off x="6318504" y="4224528"/>
-            <a:ext cx="5193792" cy="1773936"/>
+            <a:off x="6318504" y="5230368"/>
+            <a:ext cx="5193792" cy="1005840"/>
           </a:xfrm>
           <a:prstGeom prst="rect">
             <a:avLst/>
@@ -42314,13 +42854,13 @@
               </a:lnSpc>
             </a:pPr>
             <a:r>
-              <a:rPr sz="950" b="0" a:eastAsianTypeface="Microsoft YaHei">
+              <a:rPr sz="850" b="0" a:eastAsianTypeface="Microsoft YaHei">
                 <a:solidFill>
                   <a:srgbClr val="222222"/>
                 </a:solidFill>
                 <a:latin typeface="Microsoft YaHei"/>
               </a:rPr>
-              <a:t>① 追溯该批次可颂供应商与生产日期，要求书面回函说明</a:t>
+              <a:t>① 客诉与 PQNC 打通：奶类变质客诉自动触发同店同 SKU 留样 + 建单。</a:t>
             </a:r>
           </a:p>
           <a:p>
@@ -42330,13 +42870,13 @@
               </a:lnSpc>
             </a:pPr>
             <a:r>
-              <a:rPr sz="950" b="0" a:eastAsianTypeface="Microsoft YaHei">
+              <a:rPr sz="850" b="0" a:eastAsianTypeface="Microsoft YaHei">
                 <a:solidFill>
                   <a:srgbClr val="222222"/>
                 </a:solidFill>
                 <a:latin typeface="Microsoft YaHei"/>
               </a:rPr>
-              <a:t>   异物来源与包装完整性控制。</a:t>
+              <a:t>② 以客诉为「早期指标」：同 SKU 跨店 2 起变质客诉即启动批次追溯</a:t>
             </a:r>
           </a:p>
           <a:p>
@@ -42346,13 +42886,13 @@
               </a:lnSpc>
             </a:pPr>
             <a:r>
-              <a:rPr sz="950" b="0" a:eastAsianTypeface="Microsoft YaHei">
+              <a:rPr sz="850" b="0" a:eastAsianTypeface="Microsoft YaHei">
                 <a:solidFill>
                   <a:srgbClr val="222222"/>
                 </a:solidFill>
                 <a:latin typeface="Microsoft YaHei"/>
               </a:rPr>
-              <a:t/>
+              <a:t>   ——按本月时间线可提前约两周锁定 Cream-O-Land 批次。</a:t>
             </a:r>
           </a:p>
           <a:p>
@@ -42362,13 +42902,13 @@
               </a:lnSpc>
             </a:pPr>
             <a:r>
-              <a:rPr sz="950" b="0" a:eastAsianTypeface="Microsoft YaHei">
+              <a:rPr sz="850" b="0" a:eastAsianTypeface="Microsoft YaHei">
                 <a:solidFill>
                   <a:srgbClr val="222222"/>
                 </a:solidFill>
                 <a:latin typeface="Microsoft YaHei"/>
               </a:rPr>
-              <a:t>② 门店端复核轻食解冻 / 加热 / 出餐流程，检查操作台</a:t>
+              <a:t>③ 41st &amp; Lexington、15th &amp; 3rd 补开工单并追溯对应批次。</a:t>
             </a:r>
           </a:p>
           <a:p>
@@ -42378,13 +42918,13 @@
               </a:lnSpc>
             </a:pPr>
             <a:r>
-              <a:rPr sz="950" b="0" a:eastAsianTypeface="Microsoft YaHei">
+              <a:rPr sz="850" b="0" a:eastAsianTypeface="Microsoft YaHei">
                 <a:solidFill>
                   <a:srgbClr val="222222"/>
                 </a:solidFill>
                 <a:latin typeface="Microsoft YaHei"/>
               </a:rPr>
-              <a:t>   周边塑料件（包材、铲勺、封膜）是否有破损脱落。</a:t>
+              <a:t>④ 异物类单独排查：15th &amp; 3rd 员工毛发管控（发网/工帽）；</a:t>
             </a:r>
           </a:p>
           <a:p>
@@ -42394,93 +42934,13 @@
               </a:lnSpc>
             </a:pPr>
             <a:r>
-              <a:rPr sz="950" b="0" a:eastAsianTypeface="Microsoft YaHei">
+              <a:rPr sz="850" b="0" a:eastAsianTypeface="Microsoft YaHei">
                 <a:solidFill>
                   <a:srgbClr val="222222"/>
                 </a:solidFill>
                 <a:latin typeface="Microsoft YaHei"/>
               </a:rPr>
-              <a:t/>
-            </a:r>
-          </a:p>
-          <a:p>
-            <a:pPr algn="l">
-              <a:lnSpc>
-                <a:spcPct val="125000"/>
-              </a:lnSpc>
-            </a:pPr>
-            <a:r>
-              <a:rPr sz="950" b="0" a:eastAsianTypeface="Microsoft YaHei">
-                <a:solidFill>
-                  <a:srgbClr val="222222"/>
-                </a:solidFill>
-                <a:latin typeface="Microsoft YaHei"/>
-              </a:rPr>
-              <a:t>③ 保留客诉实物与照片；若供应商无法排除，则将该 SKU</a:t>
-            </a:r>
-          </a:p>
-          <a:p>
-            <a:pPr algn="l">
-              <a:lnSpc>
-                <a:spcPct val="125000"/>
-              </a:lnSpc>
-            </a:pPr>
-            <a:r>
-              <a:rPr sz="950" b="0" a:eastAsianTypeface="Microsoft YaHei">
-                <a:solidFill>
-                  <a:srgbClr val="222222"/>
-                </a:solidFill>
-                <a:latin typeface="Microsoft YaHei"/>
-              </a:rPr>
-              <a:t>   纳入到货加严抽检。</a:t>
-            </a:r>
-          </a:p>
-          <a:p>
-            <a:pPr algn="l">
-              <a:lnSpc>
-                <a:spcPct val="125000"/>
-              </a:lnSpc>
-            </a:pPr>
-            <a:r>
-              <a:rPr sz="950" b="0" a:eastAsianTypeface="Microsoft YaHei">
-                <a:solidFill>
-                  <a:srgbClr val="222222"/>
-                </a:solidFill>
-                <a:latin typeface="Microsoft YaHei"/>
-              </a:rPr>
-              <a:t/>
-            </a:r>
-          </a:p>
-          <a:p>
-            <a:pPr algn="l">
-              <a:lnSpc>
-                <a:spcPct val="125000"/>
-              </a:lnSpc>
-            </a:pPr>
-            <a:r>
-              <a:rPr sz="950" b="0" a:eastAsianTypeface="Microsoft YaHei">
-                <a:solidFill>
-                  <a:srgbClr val="222222"/>
-                </a:solidFill>
-                <a:latin typeface="Microsoft YaHei"/>
-              </a:rPr>
-              <a:t>④ 建议将客诉纳入 PQNC 体系联动，避免客诉与 PQNC 两套</a:t>
-            </a:r>
-          </a:p>
-          <a:p>
-            <a:pPr algn="l">
-              <a:lnSpc>
-                <a:spcPct val="125000"/>
-              </a:lnSpc>
-            </a:pPr>
-            <a:r>
-              <a:rPr sz="950" b="0" a:eastAsianTypeface="Microsoft YaHei">
-                <a:solidFill>
-                  <a:srgbClr val="222222"/>
-                </a:solidFill>
-                <a:latin typeface="Microsoft YaHei"/>
-              </a:rPr>
-              <a:t>   记录各自独立、无法交叉验证。</a:t>
+              <a:t>   221 Grand 可颂供应商包装与门店加热出餐环节。</a:t>
             </a:r>
           </a:p>
         </p:txBody>
@@ -54319,8 +54779,8 @@
         </p:nvSpPr>
         <p:spPr>
           <a:xfrm>
-            <a:off x="502920" y="6163056"/>
-            <a:ext cx="11155680" cy="201168"/>
+            <a:off x="502920" y="6428232"/>
+            <a:ext cx="7863840" cy="201168"/>
           </a:xfrm>
           <a:prstGeom prst="rect">
             <a:avLst/>
@@ -54339,7 +54799,7 @@
               </a:lnSpc>
             </a:pPr>
             <a:r>
-              <a:rPr sz="800" b="0" a:eastAsianTypeface="Microsoft YaHei">
+              <a:rPr sz="750" b="0" a:eastAsianTypeface="Microsoft YaHei">
                 <a:solidFill>
                   <a:srgbClr val="5F6978"/>
                 </a:solidFill>
